--- a/9주차/한국어/게임엔진기초_9주차_오프라인_강의슬라이드.pptx
+++ b/9주차/한국어/게임엔진기초_9주차_오프라인_강의슬라이드.pptx
@@ -130,7 +130,7 @@
   <p:extLst>
     <p:ext uri="{521415D9-36F7-43E2-AB2F-B90AF26B5E84}">
       <p14:sectionLst xmlns:p14="http://schemas.microsoft.com/office/powerpoint/2010/main">
-        <p14:section name="오리엔테이션" id="{d83fcae9-bf4d-e3b3-b830-1685ec1382b6}">
+        <p14:section name="오리엔테이션" id="{7873e4db-2525-bef6-b903-993ee88af010}">
           <p14:sldIdLst>
             <p14:sldId id="256"/>
             <p14:sldId id="257"/>
@@ -140,14 +140,14 @@
             <p14:sldId id="261"/>
           </p14:sldIdLst>
         </p14:section>
-        <p14:section name="원칙" id="{26225e15-b778-9d80-9d1b-24537f410042}">
+        <p14:section name="원칙" id="{404a064a-951b-e18f-b384-b0e906ee3ce3}">
           <p14:sldIdLst>
             <p14:sldId id="262"/>
             <p14:sldId id="263"/>
             <p14:sldId id="264"/>
           </p14:sldIdLst>
         </p14:section>
-        <p14:section name="에셋" id="{f31eb1cb-e498-6f33-eac8-a78d87efd5d2}">
+        <p14:section name="에셋" id="{9fd3a020-a170-4d7f-d1f8-67b95658dba0}">
           <p14:sldIdLst>
             <p14:sldId id="265"/>
             <p14:sldId id="266"/>
@@ -158,7 +158,7 @@
             <p14:sldId id="271"/>
           </p14:sldIdLst>
         </p14:section>
-        <p14:section name="AI" id="{412d233f-3834-b39d-f475-334d70885dd2}">
+        <p14:section name="AI" id="{cd156041-af64-3811-a35e-fbbf50fc25d8}">
           <p14:sldIdLst>
             <p14:sldId id="272"/>
             <p14:sldId id="273"/>
@@ -169,7 +169,7 @@
             <p14:sldId id="278"/>
           </p14:sldIdLst>
         </p14:section>
-        <p14:section name="과제" id="{b6bad598-8a87-8b6c-8ef6-8dcc97b1c38c}">
+        <p14:section name="과제" id="{b9d81e96-a3fa-9e56-06ca-a6a0d136de3e}">
           <p14:sldIdLst>
             <p14:sldId id="279"/>
           </p14:sldIdLst>
@@ -4254,7 +4254,7 @@
                 <a:ea typeface="Noto Sans KR" pitchFamily="34" charset="-122"/>
                 <a:cs typeface="Noto Sans KR" pitchFamily="34" charset="-120"/>
               </a:rPr>
-              <a:t>12/14 (월)</a:t>
+              <a:t>12/21 (월)</a:t>
             </a:r>
             <a:endParaRPr lang="en-US" sz="1500" dirty="0"/>
           </a:p>
@@ -15040,7 +15040,7 @@
                 <a:ea typeface="Noto Sans KR" pitchFamily="34" charset="-122"/>
                 <a:cs typeface="Noto Sans KR" pitchFamily="34" charset="-120"/>
               </a:rPr>
-              <a:t>새 게임 1개 · 12/14 시연. 중간의 4가지 + 에셋 · 기록 · 내 코드 설명.</a:t>
+              <a:t>새 게임 1개 · 12/21 시연. 중간의 4가지 + 에셋 · 기록 · 내 코드 설명.</a:t>
             </a:r>
             <a:endParaRPr lang="en-US" sz="1400" dirty="0"/>
           </a:p>
@@ -24902,7 +24902,7 @@
                   <a:srgbClr val="1E242B"/>
                 </a:solidFill>
               </a:rPr>
-              <a:t>기말까지 6주 — 한 주에 하나씩</a:t>
+              <a:t>기말까지 7주 — 한 주에 하나씩</a:t>
             </a:r>
             <a:endParaRPr lang="en-US" sz="2800" dirty="0"/>
           </a:p>
@@ -24955,11 +24955,11 @@
         <p:spPr>
           <a:xfrm>
             <a:off x="548640" y="1828800"/>
-            <a:ext cx="1463040" cy="2743200"/>
+            <a:ext cx="1280160" cy="2743200"/>
           </a:xfrm>
           <a:prstGeom prst="roundRect">
             <a:avLst>
-              <a:gd name="adj" fmla="val 7500"/>
+              <a:gd name="adj" fmla="val 8571"/>
             </a:avLst>
           </a:prstGeom>
           <a:solidFill>
@@ -24982,7 +24982,7 @@
         <p:spPr>
           <a:xfrm>
             <a:off x="658368" y="1938528"/>
-            <a:ext cx="1280160" cy="320040"/>
+            <a:ext cx="1097280" cy="320040"/>
           </a:xfrm>
           <a:prstGeom prst="rect">
             <a:avLst/>
@@ -25024,7 +25024,7 @@
         <p:spPr>
           <a:xfrm>
             <a:off x="658368" y="2258568"/>
-            <a:ext cx="1280160" cy="274320"/>
+            <a:ext cx="1097280" cy="274320"/>
           </a:xfrm>
           <a:prstGeom prst="rect">
             <a:avLst/>
@@ -25066,7 +25066,7 @@
         <p:spPr>
           <a:xfrm>
             <a:off x="658368" y="2697480"/>
-            <a:ext cx="1261872" cy="1737360"/>
+            <a:ext cx="1097280" cy="1737360"/>
           </a:xfrm>
           <a:prstGeom prst="rect">
             <a:avLst/>
@@ -25085,7 +25085,7 @@
               <a:buNone/>
             </a:pPr>
             <a:r>
-              <a:rPr lang="en-US" sz="1350" b="1" dirty="0">
+              <a:rPr lang="en-US" sz="1300" b="1" dirty="0">
                 <a:solidFill>
                   <a:srgbClr val="1E242B"/>
                 </a:solidFill>
@@ -25095,7 +25095,7 @@
               </a:rPr>
               <a:t>기획 · 에셋 첫 사용 · 첫 조작</a:t>
             </a:r>
-            <a:endParaRPr lang="en-US" sz="1350" dirty="0"/>
+            <a:endParaRPr lang="en-US" sz="1300" dirty="0"/>
           </a:p>
         </p:txBody>
       </p:sp>
@@ -25107,12 +25107,12 @@
         </p:nvSpPr>
         <p:spPr>
           <a:xfrm>
-            <a:off x="2139696" y="1828800"/>
-            <a:ext cx="1463040" cy="2743200"/>
+            <a:off x="1947672" y="1828800"/>
+            <a:ext cx="1280160" cy="2743200"/>
           </a:xfrm>
           <a:prstGeom prst="roundRect">
             <a:avLst>
-              <a:gd name="adj" fmla="val 7500"/>
+              <a:gd name="adj" fmla="val 8571"/>
             </a:avLst>
           </a:prstGeom>
           <a:solidFill>
@@ -25129,8 +25129,8 @@
         </p:nvSpPr>
         <p:spPr>
           <a:xfrm>
-            <a:off x="2249424" y="1938528"/>
-            <a:ext cx="1280160" cy="320040"/>
+            <a:off x="2057400" y="1938528"/>
+            <a:ext cx="1097280" cy="320040"/>
           </a:xfrm>
           <a:prstGeom prst="rect">
             <a:avLst/>
@@ -25171,8 +25171,8 @@
         </p:nvSpPr>
         <p:spPr>
           <a:xfrm>
-            <a:off x="2249424" y="2258568"/>
-            <a:ext cx="1280160" cy="274320"/>
+            <a:off x="2057400" y="2258568"/>
+            <a:ext cx="1097280" cy="274320"/>
           </a:xfrm>
           <a:prstGeom prst="rect">
             <a:avLst/>
@@ -25213,8 +25213,8 @@
         </p:nvSpPr>
         <p:spPr>
           <a:xfrm>
-            <a:off x="2249424" y="2697480"/>
-            <a:ext cx="1261872" cy="1737360"/>
+            <a:off x="2057400" y="2697480"/>
+            <a:ext cx="1097280" cy="1737360"/>
           </a:xfrm>
           <a:prstGeom prst="rect">
             <a:avLst/>
@@ -25233,7 +25233,7 @@
               <a:buNone/>
             </a:pPr>
             <a:r>
-              <a:rPr lang="en-US" sz="1350" b="1" dirty="0">
+              <a:rPr lang="en-US" sz="1300" b="1" dirty="0">
                 <a:solidFill>
                   <a:srgbClr val="1E242B"/>
                 </a:solidFill>
@@ -25243,7 +25243,7 @@
               </a:rPr>
               <a:t>핵심 규칙 · 승패</a:t>
             </a:r>
-            <a:endParaRPr lang="en-US" sz="1350" dirty="0"/>
+            <a:endParaRPr lang="en-US" sz="1300" dirty="0"/>
           </a:p>
         </p:txBody>
       </p:sp>
@@ -25255,12 +25255,12 @@
         </p:nvSpPr>
         <p:spPr>
           <a:xfrm>
-            <a:off x="3730752" y="1828800"/>
-            <a:ext cx="1463040" cy="2743200"/>
+            <a:off x="3346704" y="1828800"/>
+            <a:ext cx="1280160" cy="2743200"/>
           </a:xfrm>
           <a:prstGeom prst="roundRect">
             <a:avLst>
-              <a:gd name="adj" fmla="val 7500"/>
+              <a:gd name="adj" fmla="val 8571"/>
             </a:avLst>
           </a:prstGeom>
           <a:solidFill>
@@ -25277,8 +25277,8 @@
         </p:nvSpPr>
         <p:spPr>
           <a:xfrm>
-            <a:off x="3840480" y="1938528"/>
-            <a:ext cx="1280160" cy="320040"/>
+            <a:off x="3456432" y="1938528"/>
+            <a:ext cx="1097280" cy="320040"/>
           </a:xfrm>
           <a:prstGeom prst="rect">
             <a:avLst/>
@@ -25319,8 +25319,8 @@
         </p:nvSpPr>
         <p:spPr>
           <a:xfrm>
-            <a:off x="3840480" y="2258568"/>
-            <a:ext cx="1280160" cy="274320"/>
+            <a:off x="3456432" y="2258568"/>
+            <a:ext cx="1097280" cy="274320"/>
           </a:xfrm>
           <a:prstGeom prst="rect">
             <a:avLst/>
@@ -25361,8 +25361,8 @@
         </p:nvSpPr>
         <p:spPr>
           <a:xfrm>
-            <a:off x="3840480" y="2697480"/>
-            <a:ext cx="1261872" cy="1737360"/>
+            <a:off x="3456432" y="2697480"/>
+            <a:ext cx="1097280" cy="1737360"/>
           </a:xfrm>
           <a:prstGeom prst="rect">
             <a:avLst/>
@@ -25381,7 +25381,7 @@
               <a:buNone/>
             </a:pPr>
             <a:r>
-              <a:rPr lang="en-US" sz="1350" b="1" dirty="0">
+              <a:rPr lang="en-US" sz="1300" b="1" dirty="0">
                 <a:solidFill>
                   <a:srgbClr val="1E242B"/>
                 </a:solidFill>
@@ -25391,7 +25391,7 @@
               </a:rPr>
               <a:t>에셋 입히기 · 맵</a:t>
             </a:r>
-            <a:endParaRPr lang="en-US" sz="1350" dirty="0"/>
+            <a:endParaRPr lang="en-US" sz="1300" dirty="0"/>
           </a:p>
         </p:txBody>
       </p:sp>
@@ -25403,12 +25403,12 @@
         </p:nvSpPr>
         <p:spPr>
           <a:xfrm>
-            <a:off x="5321808" y="1828800"/>
-            <a:ext cx="1463040" cy="2743200"/>
+            <a:off x="4745736" y="1828800"/>
+            <a:ext cx="1280160" cy="2743200"/>
           </a:xfrm>
           <a:prstGeom prst="roundRect">
             <a:avLst>
-              <a:gd name="adj" fmla="val 7500"/>
+              <a:gd name="adj" fmla="val 8571"/>
             </a:avLst>
           </a:prstGeom>
           <a:solidFill>
@@ -25425,8 +25425,8 @@
         </p:nvSpPr>
         <p:spPr>
           <a:xfrm>
-            <a:off x="5431536" y="1938528"/>
-            <a:ext cx="1280160" cy="320040"/>
+            <a:off x="4855464" y="1938528"/>
+            <a:ext cx="1097280" cy="320040"/>
           </a:xfrm>
           <a:prstGeom prst="rect">
             <a:avLst/>
@@ -25467,8 +25467,8 @@
         </p:nvSpPr>
         <p:spPr>
           <a:xfrm>
-            <a:off x="5431536" y="2258568"/>
-            <a:ext cx="1280160" cy="274320"/>
+            <a:off x="4855464" y="2258568"/>
+            <a:ext cx="1097280" cy="274320"/>
           </a:xfrm>
           <a:prstGeom prst="rect">
             <a:avLst/>
@@ -25509,8 +25509,8 @@
         </p:nvSpPr>
         <p:spPr>
           <a:xfrm>
-            <a:off x="5431536" y="2697480"/>
-            <a:ext cx="1261872" cy="1737360"/>
+            <a:off x="4855464" y="2697480"/>
+            <a:ext cx="1097280" cy="1737360"/>
           </a:xfrm>
           <a:prstGeom prst="rect">
             <a:avLst/>
@@ -25529,7 +25529,7 @@
               <a:buNone/>
             </a:pPr>
             <a:r>
-              <a:rPr lang="en-US" sz="1350" b="1" dirty="0">
+              <a:rPr lang="en-US" sz="1300" b="1" dirty="0">
                 <a:solidFill>
                   <a:srgbClr val="1E242B"/>
                 </a:solidFill>
@@ -25539,7 +25539,7 @@
               </a:rPr>
               <a:t>화면 3개 · 소리 · 이펙트</a:t>
             </a:r>
-            <a:endParaRPr lang="en-US" sz="1350" dirty="0"/>
+            <a:endParaRPr lang="en-US" sz="1300" dirty="0"/>
           </a:p>
         </p:txBody>
       </p:sp>
@@ -25551,12 +25551,12 @@
         </p:nvSpPr>
         <p:spPr>
           <a:xfrm>
-            <a:off x="6912864" y="1828800"/>
-            <a:ext cx="1463040" cy="2743200"/>
+            <a:off x="6144768" y="1828800"/>
+            <a:ext cx="1280160" cy="2743200"/>
           </a:xfrm>
           <a:prstGeom prst="roundRect">
             <a:avLst>
-              <a:gd name="adj" fmla="val 7500"/>
+              <a:gd name="adj" fmla="val 8571"/>
             </a:avLst>
           </a:prstGeom>
           <a:solidFill>
@@ -25573,8 +25573,8 @@
         </p:nvSpPr>
         <p:spPr>
           <a:xfrm>
-            <a:off x="7022592" y="1938528"/>
-            <a:ext cx="1280160" cy="320040"/>
+            <a:off x="6254496" y="1938528"/>
+            <a:ext cx="1097280" cy="320040"/>
           </a:xfrm>
           <a:prstGeom prst="rect">
             <a:avLst/>
@@ -25615,8 +25615,8 @@
         </p:nvSpPr>
         <p:spPr>
           <a:xfrm>
-            <a:off x="7022592" y="2258568"/>
-            <a:ext cx="1280160" cy="274320"/>
+            <a:off x="6254496" y="2258568"/>
+            <a:ext cx="1097280" cy="274320"/>
           </a:xfrm>
           <a:prstGeom prst="rect">
             <a:avLst/>
@@ -25657,8 +25657,8 @@
         </p:nvSpPr>
         <p:spPr>
           <a:xfrm>
-            <a:off x="7022592" y="2697480"/>
-            <a:ext cx="1261872" cy="1737360"/>
+            <a:off x="6254496" y="2697480"/>
+            <a:ext cx="1097280" cy="1737360"/>
           </a:xfrm>
           <a:prstGeom prst="rect">
             <a:avLst/>
@@ -25677,7 +25677,7 @@
               <a:buNone/>
             </a:pPr>
             <a:r>
-              <a:rPr lang="en-US" sz="1350" b="1" dirty="0">
+              <a:rPr lang="en-US" sz="1300" b="1" dirty="0">
                 <a:solidFill>
                   <a:srgbClr val="1E242B"/>
                 </a:solidFill>
@@ -25687,7 +25687,7 @@
               </a:rPr>
               <a:t>플레이테스트 · 난이도</a:t>
             </a:r>
-            <a:endParaRPr lang="en-US" sz="1350" dirty="0"/>
+            <a:endParaRPr lang="en-US" sz="1300" dirty="0"/>
           </a:p>
         </p:txBody>
       </p:sp>
@@ -25699,12 +25699,12 @@
         </p:nvSpPr>
         <p:spPr>
           <a:xfrm>
-            <a:off x="8503920" y="1828800"/>
-            <a:ext cx="1463040" cy="2743200"/>
+            <a:off x="7543800" y="1828800"/>
+            <a:ext cx="1280160" cy="2743200"/>
           </a:xfrm>
           <a:prstGeom prst="roundRect">
             <a:avLst>
-              <a:gd name="adj" fmla="val 7500"/>
+              <a:gd name="adj" fmla="val 8571"/>
             </a:avLst>
           </a:prstGeom>
           <a:solidFill>
@@ -25721,8 +25721,8 @@
         </p:nvSpPr>
         <p:spPr>
           <a:xfrm>
-            <a:off x="8613648" y="1938528"/>
-            <a:ext cx="1280160" cy="320040"/>
+            <a:off x="7653528" y="1938528"/>
+            <a:ext cx="1097280" cy="320040"/>
           </a:xfrm>
           <a:prstGeom prst="rect">
             <a:avLst/>
@@ -25763,8 +25763,8 @@
         </p:nvSpPr>
         <p:spPr>
           <a:xfrm>
-            <a:off x="8613648" y="2258568"/>
-            <a:ext cx="1280160" cy="274320"/>
+            <a:off x="7653528" y="2258568"/>
+            <a:ext cx="1097280" cy="274320"/>
           </a:xfrm>
           <a:prstGeom prst="rect">
             <a:avLst/>
@@ -25805,8 +25805,8 @@
         </p:nvSpPr>
         <p:spPr>
           <a:xfrm>
-            <a:off x="8613648" y="2697480"/>
-            <a:ext cx="1261872" cy="1737360"/>
+            <a:off x="7653528" y="2697480"/>
+            <a:ext cx="1097280" cy="1737360"/>
           </a:xfrm>
           <a:prstGeom prst="rect">
             <a:avLst/>
@@ -25825,7 +25825,7 @@
               <a:buNone/>
             </a:pPr>
             <a:r>
-              <a:rPr lang="en-US" sz="1350" b="1" dirty="0">
+              <a:rPr lang="en-US" sz="1300" b="1" dirty="0">
                 <a:solidFill>
                   <a:srgbClr val="1E242B"/>
                 </a:solidFill>
@@ -25833,9 +25833,9 @@
                 <a:ea typeface="Noto Sans KR" pitchFamily="34" charset="-122"/>
                 <a:cs typeface="Noto Sans KR" pitchFamily="34" charset="-120"/>
               </a:rPr>
-              <a:t>마무리 · 빌드 · 연습</a:t>
-            </a:r>
-            <a:endParaRPr lang="en-US" sz="1350" dirty="0"/>
+              <a:t>버그 잡기 · 다듬기</a:t>
+            </a:r>
+            <a:endParaRPr lang="en-US" sz="1300" dirty="0"/>
           </a:p>
         </p:txBody>
       </p:sp>
@@ -25847,16 +25847,16 @@
         </p:nvSpPr>
         <p:spPr>
           <a:xfrm>
-            <a:off x="10094976" y="1828800"/>
-            <a:ext cx="1463040" cy="2743200"/>
+            <a:off x="8942832" y="1828800"/>
+            <a:ext cx="1280160" cy="2743200"/>
           </a:xfrm>
           <a:prstGeom prst="roundRect">
             <a:avLst>
-              <a:gd name="adj" fmla="val 7500"/>
+              <a:gd name="adj" fmla="val 8571"/>
             </a:avLst>
           </a:prstGeom>
           <a:solidFill>
-            <a:srgbClr val="FCEAEA"/>
+            <a:srgbClr val="F3F5F7"/>
           </a:solidFill>
           <a:ln/>
         </p:spPr>
@@ -25869,8 +25869,8 @@
         </p:nvSpPr>
         <p:spPr>
           <a:xfrm>
-            <a:off x="10204704" y="1938528"/>
-            <a:ext cx="1280160" cy="320040"/>
+            <a:off x="9052560" y="1938528"/>
+            <a:ext cx="1097280" cy="320040"/>
           </a:xfrm>
           <a:prstGeom prst="rect">
             <a:avLst/>
@@ -25891,7 +25891,7 @@
             <a:r>
               <a:rPr lang="en-US" sz="1400" b="1" dirty="0">
                 <a:solidFill>
-                  <a:srgbClr val="D04444"/>
+                  <a:srgbClr val="5F6B78"/>
                 </a:solidFill>
                 <a:latin typeface="Noto Sans KR" pitchFamily="34" charset="0"/>
                 <a:ea typeface="Noto Sans KR" pitchFamily="34" charset="-122"/>
@@ -25911,8 +25911,8 @@
         </p:nvSpPr>
         <p:spPr>
           <a:xfrm>
-            <a:off x="10204704" y="2258568"/>
-            <a:ext cx="1280160" cy="274320"/>
+            <a:off x="9052560" y="2258568"/>
+            <a:ext cx="1097280" cy="274320"/>
           </a:xfrm>
           <a:prstGeom prst="rect">
             <a:avLst/>
@@ -25953,8 +25953,8 @@
         </p:nvSpPr>
         <p:spPr>
           <a:xfrm>
-            <a:off x="10204704" y="2697480"/>
-            <a:ext cx="1261872" cy="1737360"/>
+            <a:off x="9052560" y="2697480"/>
+            <a:ext cx="1097280" cy="1737360"/>
           </a:xfrm>
           <a:prstGeom prst="rect">
             <a:avLst/>
@@ -25973,7 +25973,7 @@
               <a:buNone/>
             </a:pPr>
             <a:r>
-              <a:rPr lang="en-US" sz="1350" b="1" dirty="0">
+              <a:rPr lang="en-US" sz="1300" b="1" dirty="0">
                 <a:solidFill>
                   <a:srgbClr val="1E242B"/>
                 </a:solidFill>
@@ -25981,15 +25981,183 @@
                 <a:ea typeface="Noto Sans KR" pitchFamily="34" charset="-122"/>
                 <a:cs typeface="Noto Sans KR" pitchFamily="34" charset="-120"/>
               </a:rPr>
+              <a:t>마무리 · 빌드 · 연습</a:t>
+            </a:r>
+            <a:endParaRPr lang="en-US" sz="1300" dirty="0"/>
+          </a:p>
+        </p:txBody>
+      </p:sp>
+      <p:sp>
+        <p:nvSpPr>
+          <p:cNvPr id="33" name="Shape 31"/>
+          <p:cNvSpPr/>
+          <p:nvPr/>
+        </p:nvSpPr>
+        <p:spPr>
+          <a:xfrm>
+            <a:off x="10341864" y="1828800"/>
+            <a:ext cx="1280160" cy="2743200"/>
+          </a:xfrm>
+          <a:prstGeom prst="roundRect">
+            <a:avLst>
+              <a:gd name="adj" fmla="val 8571"/>
+            </a:avLst>
+          </a:prstGeom>
+          <a:solidFill>
+            <a:srgbClr val="FCEAEA"/>
+          </a:solidFill>
+          <a:ln/>
+        </p:spPr>
+      </p:sp>
+      <p:sp>
+        <p:nvSpPr>
+          <p:cNvPr id="34" name="Text 32"/>
+          <p:cNvSpPr txBox="1"/>
+          <p:nvPr/>
+        </p:nvSpPr>
+        <p:spPr>
+          <a:xfrm>
+            <a:off x="10451592" y="1938528"/>
+            <a:ext cx="1097280" cy="320040"/>
+          </a:xfrm>
+          <a:prstGeom prst="rect">
+            <a:avLst/>
+          </a:prstGeom>
+          <a:noFill/>
+          <a:ln/>
+        </p:spPr>
+        <p:txBody>
+          <a:bodyPr wrap="square" lIns="0" tIns="0" rIns="0" bIns="0" rtlCol="0" anchor="t"/>
+          <a:lstStyle/>
+          <a:p>
+            <a:pPr algn="l" indent="0" marL="0">
+              <a:lnSpc>
+                <a:spcPct val="115000"/>
+              </a:lnSpc>
+              <a:buNone/>
+            </a:pPr>
+            <a:r>
+              <a:rPr lang="en-US" sz="1400" b="1" dirty="0">
+                <a:solidFill>
+                  <a:srgbClr val="D04444"/>
+                </a:solidFill>
+                <a:latin typeface="Noto Sans KR" pitchFamily="34" charset="0"/>
+                <a:ea typeface="Noto Sans KR" pitchFamily="34" charset="-122"/>
+                <a:cs typeface="Noto Sans KR" pitchFamily="34" charset="-120"/>
+              </a:rPr>
+              <a:t>16주차</a:t>
+            </a:r>
+            <a:endParaRPr lang="en-US" sz="1400" dirty="0"/>
+          </a:p>
+        </p:txBody>
+      </p:sp>
+      <p:sp>
+        <p:nvSpPr>
+          <p:cNvPr id="35" name="Text 33"/>
+          <p:cNvSpPr txBox="1"/>
+          <p:nvPr/>
+        </p:nvSpPr>
+        <p:spPr>
+          <a:xfrm>
+            <a:off x="10451592" y="2258568"/>
+            <a:ext cx="1097280" cy="274320"/>
+          </a:xfrm>
+          <a:prstGeom prst="rect">
+            <a:avLst/>
+          </a:prstGeom>
+          <a:noFill/>
+          <a:ln/>
+        </p:spPr>
+        <p:txBody>
+          <a:bodyPr wrap="square" lIns="0" tIns="0" rIns="0" bIns="0" rtlCol="0" anchor="t"/>
+          <a:lstStyle/>
+          <a:p>
+            <a:pPr algn="l" indent="0" marL="0">
+              <a:lnSpc>
+                <a:spcPct val="115000"/>
+              </a:lnSpc>
+              <a:buNone/>
+            </a:pPr>
+            <a:r>
+              <a:rPr lang="en-US" sz="1200" dirty="0">
+                <a:solidFill>
+                  <a:srgbClr val="5F6B78"/>
+                </a:solidFill>
+                <a:latin typeface="Noto Sans KR" pitchFamily="34" charset="0"/>
+                <a:ea typeface="Noto Sans KR" pitchFamily="34" charset="-122"/>
+                <a:cs typeface="Noto Sans KR" pitchFamily="34" charset="-120"/>
+              </a:rPr>
+              <a:t>12/21</a:t>
+            </a:r>
+            <a:endParaRPr lang="en-US" sz="1200" dirty="0"/>
+          </a:p>
+        </p:txBody>
+      </p:sp>
+      <p:sp>
+        <p:nvSpPr>
+          <p:cNvPr id="36" name="Text 34"/>
+          <p:cNvSpPr txBox="1"/>
+          <p:nvPr/>
+        </p:nvSpPr>
+        <p:spPr>
+          <a:xfrm>
+            <a:off x="10451592" y="2697480"/>
+            <a:ext cx="1097280" cy="1737360"/>
+          </a:xfrm>
+          <a:prstGeom prst="rect">
+            <a:avLst/>
+          </a:prstGeom>
+          <a:noFill/>
+          <a:ln/>
+        </p:spPr>
+        <p:txBody>
+          <a:bodyPr wrap="square" lIns="0" tIns="0" rIns="0" bIns="0" rtlCol="0" anchor="t"/>
+          <a:lstStyle/>
+          <a:p>
+            <a:pPr algn="l" indent="0" marL="0">
+              <a:lnSpc>
+                <a:spcPct val="115000"/>
+              </a:lnSpc>
+              <a:buNone/>
+            </a:pPr>
+            <a:r>
+              <a:rPr lang="en-US" sz="1300" b="1" dirty="0">
+                <a:solidFill>
+                  <a:srgbClr val="1E242B"/>
+                </a:solidFill>
+                <a:latin typeface="Noto Sans KR" pitchFamily="34" charset="0"/>
+                <a:ea typeface="Noto Sans KR" pitchFamily="34" charset="-122"/>
+                <a:cs typeface="Noto Sans KR" pitchFamily="34" charset="-120"/>
+              </a:rPr>
               <a:t>기말 시연</a:t>
             </a:r>
-            <a:endParaRPr lang="en-US" sz="1350" dirty="0"/>
-          </a:p>
-        </p:txBody>
-      </p:sp>
-      <p:sp>
-        <p:nvSpPr>
-          <p:cNvPr id="33" name="Shape 31"/>
+            <a:endParaRPr lang="en-US" sz="1300" dirty="0"/>
+          </a:p>
+          <a:p>
+            <a:pPr algn="l" indent="0" marL="0">
+              <a:lnSpc>
+                <a:spcPct val="115000"/>
+              </a:lnSpc>
+              <a:buNone/>
+            </a:pPr>
+            <a:r>
+              <a:rPr lang="en-US" sz="1300" b="1" dirty="0">
+                <a:solidFill>
+                  <a:srgbClr val="1E242B"/>
+                </a:solidFill>
+                <a:latin typeface="Noto Sans KR" pitchFamily="34" charset="0"/>
+                <a:ea typeface="Noto Sans KR" pitchFamily="34" charset="-122"/>
+                <a:cs typeface="Noto Sans KR" pitchFamily="34" charset="-120"/>
+              </a:rPr>
+              <a:t>(기말고사)</a:t>
+            </a:r>
+            <a:endParaRPr lang="en-US" sz="1300" dirty="0"/>
+          </a:p>
+        </p:txBody>
+      </p:sp>
+      <p:sp>
+        <p:nvSpPr>
+          <p:cNvPr id="37" name="Shape 35"/>
           <p:cNvSpPr/>
           <p:nvPr/>
         </p:nvSpPr>
@@ -26011,7 +26179,7 @@
       </p:sp>
       <p:sp>
         <p:nvSpPr>
-          <p:cNvPr id="34" name="Text 32"/>
+          <p:cNvPr id="38" name="Text 36"/>
           <p:cNvSpPr txBox="1"/>
           <p:nvPr/>
         </p:nvSpPr>
@@ -26053,7 +26221,7 @@
       </p:sp>
       <p:sp>
         <p:nvSpPr>
-          <p:cNvPr id="35" name="Shape 33"/>
+          <p:cNvPr id="39" name="Shape 37"/>
           <p:cNvSpPr/>
           <p:nvPr/>
         </p:nvSpPr>
@@ -26073,7 +26241,7 @@
       </p:sp>
       <p:sp>
         <p:nvSpPr>
-          <p:cNvPr id="36" name="Text 34"/>
+          <p:cNvPr id="40" name="Text 38"/>
           <p:cNvSpPr txBox="1"/>
           <p:nvPr/>
         </p:nvSpPr>
